--- a/Science_Complete_Course_SagarSir/02_Chemistry_रसायन_विज्ञान/Class_11_SyntheticFibres_Plastics_Changes.pptx
+++ b/Science_Complete_Course_SagarSir/02_Chemistry_रसायन_विज्ञान/Class_11_SyntheticFibres_Plastics_Changes.pptx
@@ -3553,7 +3553,7 @@
               </a:defRPr>
             </a:pPr>
             <a:r>
-              <a:t>मार्गदर्शक: सागर सर (NMMS King)  |  Helpline / WhatsApp: +91 91101 13671  |  Website: sagarcoaching.tech</a:t>
+              <a:t>मार्गदर्शक: सागर सर (NMMS King)  |  Website: sagarcoaching.tech</a:t>
             </a:r>
           </a:p>
         </p:txBody>
@@ -3725,7 +3725,7 @@
               </a:defRPr>
             </a:pPr>
             <a:r>
-              <a:t>WhatsApp / Helpline: +91 91101 13671  |  वेबसाइट: sagarcoaching.tech  |  Slide 10 of 37</a:t>
+              <a:t>वेबसाइट: sagarcoaching.tech  |  Slide 10 of 37</a:t>
             </a:r>
           </a:p>
         </p:txBody>
@@ -4243,7 +4243,7 @@
               </a:defRPr>
             </a:pPr>
             <a:r>
-              <a:t>WhatsApp / Helpline: +91 91101 13671  |  वेबसाइट: sagarcoaching.tech  |  Slide 11 of 37</a:t>
+              <a:t>वेबसाइट: sagarcoaching.tech  |  Slide 11 of 37</a:t>
             </a:r>
           </a:p>
         </p:txBody>
@@ -4690,7 +4690,7 @@
               </a:defRPr>
             </a:pPr>
             <a:r>
-              <a:t>WhatsApp / Helpline: +91 91101 13671  |  वेबसाइट: sagarcoaching.tech  |  Slide 12 of 37</a:t>
+              <a:t>वेबसाइट: sagarcoaching.tech  |  Slide 12 of 37</a:t>
             </a:r>
           </a:p>
         </p:txBody>
@@ -5208,7 +5208,7 @@
               </a:defRPr>
             </a:pPr>
             <a:r>
-              <a:t>WhatsApp / Helpline: +91 91101 13671  |  वेबसाइट: sagarcoaching.tech  |  Slide 13 of 37</a:t>
+              <a:t>वेबसाइट: sagarcoaching.tech  |  Slide 13 of 37</a:t>
             </a:r>
           </a:p>
         </p:txBody>
@@ -5655,7 +5655,7 @@
               </a:defRPr>
             </a:pPr>
             <a:r>
-              <a:t>WhatsApp / Helpline: +91 91101 13671  |  वेबसाइट: sagarcoaching.tech  |  Slide 14 of 37</a:t>
+              <a:t>वेबसाइट: sagarcoaching.tech  |  Slide 14 of 37</a:t>
             </a:r>
           </a:p>
         </p:txBody>
@@ -6173,7 +6173,7 @@
               </a:defRPr>
             </a:pPr>
             <a:r>
-              <a:t>WhatsApp / Helpline: +91 91101 13671  |  वेबसाइट: sagarcoaching.tech  |  Slide 15 of 37</a:t>
+              <a:t>वेबसाइट: sagarcoaching.tech  |  Slide 15 of 37</a:t>
             </a:r>
           </a:p>
         </p:txBody>
@@ -6620,7 +6620,7 @@
               </a:defRPr>
             </a:pPr>
             <a:r>
-              <a:t>WhatsApp / Helpline: +91 91101 13671  |  वेबसाइट: sagarcoaching.tech  |  Slide 16 of 37</a:t>
+              <a:t>वेबसाइट: sagarcoaching.tech  |  Slide 16 of 37</a:t>
             </a:r>
           </a:p>
         </p:txBody>
@@ -7138,7 +7138,7 @@
               </a:defRPr>
             </a:pPr>
             <a:r>
-              <a:t>WhatsApp / Helpline: +91 91101 13671  |  वेबसाइट: sagarcoaching.tech  |  Slide 17 of 37</a:t>
+              <a:t>वेबसाइट: sagarcoaching.tech  |  Slide 17 of 37</a:t>
             </a:r>
           </a:p>
         </p:txBody>
@@ -7585,7 +7585,7 @@
               </a:defRPr>
             </a:pPr>
             <a:r>
-              <a:t>WhatsApp / Helpline: +91 91101 13671  |  वेबसाइट: sagarcoaching.tech  |  Slide 18 of 37</a:t>
+              <a:t>वेबसाइट: sagarcoaching.tech  |  Slide 18 of 37</a:t>
             </a:r>
           </a:p>
         </p:txBody>
@@ -8103,7 +8103,7 @@
               </a:defRPr>
             </a:pPr>
             <a:r>
-              <a:t>WhatsApp / Helpline: +91 91101 13671  |  वेबसाइट: sagarcoaching.tech  |  Slide 19 of 37</a:t>
+              <a:t>वेबसाइट: sagarcoaching.tech  |  Slide 19 of 37</a:t>
             </a:r>
           </a:p>
         </p:txBody>
@@ -8550,7 +8550,7 @@
               </a:defRPr>
             </a:pPr>
             <a:r>
-              <a:t>WhatsApp / Helpline: +91 91101 13671  |  वेबसाइट: sagarcoaching.tech  |  Slide 2 of 37</a:t>
+              <a:t>वेबसाइट: sagarcoaching.tech  |  Slide 2 of 37</a:t>
             </a:r>
           </a:p>
         </p:txBody>
@@ -8948,7 +8948,7 @@
               </a:defRPr>
             </a:pPr>
             <a:r>
-              <a:t>WhatsApp / Helpline: +91 91101 13671  |  वेबसाइट: sagarcoaching.tech  |  Slide 20 of 37</a:t>
+              <a:t>वेबसाइट: sagarcoaching.tech  |  Slide 20 of 37</a:t>
             </a:r>
           </a:p>
         </p:txBody>
@@ -9466,7 +9466,7 @@
               </a:defRPr>
             </a:pPr>
             <a:r>
-              <a:t>WhatsApp / Helpline: +91 91101 13671  |  वेबसाइट: sagarcoaching.tech  |  Slide 21 of 37</a:t>
+              <a:t>वेबसाइट: sagarcoaching.tech  |  Slide 21 of 37</a:t>
             </a:r>
           </a:p>
         </p:txBody>
@@ -9913,7 +9913,7 @@
               </a:defRPr>
             </a:pPr>
             <a:r>
-              <a:t>WhatsApp / Helpline: +91 91101 13671  |  वेबसाइट: sagarcoaching.tech  |  Slide 22 of 37</a:t>
+              <a:t>वेबसाइट: sagarcoaching.tech  |  Slide 22 of 37</a:t>
             </a:r>
           </a:p>
         </p:txBody>
@@ -10431,7 +10431,7 @@
               </a:defRPr>
             </a:pPr>
             <a:r>
-              <a:t>WhatsApp / Helpline: +91 91101 13671  |  वेबसाइट: sagarcoaching.tech  |  Slide 23 of 37</a:t>
+              <a:t>वेबसाइट: sagarcoaching.tech  |  Slide 23 of 37</a:t>
             </a:r>
           </a:p>
         </p:txBody>
@@ -10878,7 +10878,7 @@
               </a:defRPr>
             </a:pPr>
             <a:r>
-              <a:t>WhatsApp / Helpline: +91 91101 13671  |  वेबसाइट: sagarcoaching.tech  |  Slide 24 of 37</a:t>
+              <a:t>वेबसाइट: sagarcoaching.tech  |  Slide 24 of 37</a:t>
             </a:r>
           </a:p>
         </p:txBody>
@@ -11396,7 +11396,7 @@
               </a:defRPr>
             </a:pPr>
             <a:r>
-              <a:t>WhatsApp / Helpline: +91 91101 13671  |  वेबसाइट: sagarcoaching.tech  |  Slide 25 of 37</a:t>
+              <a:t>वेबसाइट: sagarcoaching.tech  |  Slide 25 of 37</a:t>
             </a:r>
           </a:p>
         </p:txBody>
@@ -11843,7 +11843,7 @@
               </a:defRPr>
             </a:pPr>
             <a:r>
-              <a:t>WhatsApp / Helpline: +91 91101 13671  |  वेबसाइट: sagarcoaching.tech  |  Slide 26 of 37</a:t>
+              <a:t>वेबसाइट: sagarcoaching.tech  |  Slide 26 of 37</a:t>
             </a:r>
           </a:p>
         </p:txBody>
@@ -12361,7 +12361,7 @@
               </a:defRPr>
             </a:pPr>
             <a:r>
-              <a:t>WhatsApp / Helpline: +91 91101 13671  |  वेबसाइट: sagarcoaching.tech  |  Slide 27 of 37</a:t>
+              <a:t>वेबसाइट: sagarcoaching.tech  |  Slide 27 of 37</a:t>
             </a:r>
           </a:p>
         </p:txBody>
@@ -12808,7 +12808,7 @@
               </a:defRPr>
             </a:pPr>
             <a:r>
-              <a:t>WhatsApp / Helpline: +91 91101 13671  |  वेबसाइट: sagarcoaching.tech  |  Slide 28 of 37</a:t>
+              <a:t>वेबसाइट: sagarcoaching.tech  |  Slide 28 of 37</a:t>
             </a:r>
           </a:p>
         </p:txBody>
@@ -13326,7 +13326,7 @@
               </a:defRPr>
             </a:pPr>
             <a:r>
-              <a:t>WhatsApp / Helpline: +91 91101 13671  |  वेबसाइट: sagarcoaching.tech  |  Slide 29 of 37</a:t>
+              <a:t>वेबसाइट: sagarcoaching.tech  |  Slide 29 of 37</a:t>
             </a:r>
           </a:p>
         </p:txBody>
@@ -13773,7 +13773,7 @@
               </a:defRPr>
             </a:pPr>
             <a:r>
-              <a:t>WhatsApp / Helpline: +91 91101 13671  |  वेबसाइट: sagarcoaching.tech  |  Slide 3 of 37</a:t>
+              <a:t>वेबसाइट: sagarcoaching.tech  |  Slide 3 of 37</a:t>
             </a:r>
           </a:p>
         </p:txBody>
@@ -14190,7 +14190,7 @@
               </a:defRPr>
             </a:pPr>
             <a:r>
-              <a:t>WhatsApp / Helpline: +91 91101 13671  |  वेबसाइट: sagarcoaching.tech  |  Slide 30 of 37</a:t>
+              <a:t>वेबसाइट: sagarcoaching.tech  |  Slide 30 of 37</a:t>
             </a:r>
           </a:p>
         </p:txBody>
@@ -14708,7 +14708,7 @@
               </a:defRPr>
             </a:pPr>
             <a:r>
-              <a:t>WhatsApp / Helpline: +91 91101 13671  |  वेबसाइट: sagarcoaching.tech  |  Slide 31 of 37</a:t>
+              <a:t>वेबसाइट: sagarcoaching.tech  |  Slide 31 of 37</a:t>
             </a:r>
           </a:p>
         </p:txBody>
@@ -15155,7 +15155,7 @@
               </a:defRPr>
             </a:pPr>
             <a:r>
-              <a:t>WhatsApp / Helpline: +91 91101 13671  |  वेबसाइट: sagarcoaching.tech  |  Slide 32 of 37</a:t>
+              <a:t>वेबसाइट: sagarcoaching.tech  |  Slide 32 of 37</a:t>
             </a:r>
           </a:p>
         </p:txBody>
@@ -15673,7 +15673,7 @@
               </a:defRPr>
             </a:pPr>
             <a:r>
-              <a:t>WhatsApp / Helpline: +91 91101 13671  |  वेबसाइट: sagarcoaching.tech  |  Slide 33 of 37</a:t>
+              <a:t>वेबसाइट: sagarcoaching.tech  |  Slide 33 of 37</a:t>
             </a:r>
           </a:p>
         </p:txBody>
@@ -16120,7 +16120,7 @@
               </a:defRPr>
             </a:pPr>
             <a:r>
-              <a:t>WhatsApp / Helpline: +91 91101 13671  |  वेबसाइट: sagarcoaching.tech  |  Slide 34 of 37</a:t>
+              <a:t>वेबसाइट: sagarcoaching.tech  |  Slide 34 of 37</a:t>
             </a:r>
           </a:p>
         </p:txBody>
@@ -16638,7 +16638,7 @@
               </a:defRPr>
             </a:pPr>
             <a:r>
-              <a:t>WhatsApp / Helpline: +91 91101 13671  |  वेबसाइट: sagarcoaching.tech  |  Slide 35 of 37</a:t>
+              <a:t>वेबसाइट: sagarcoaching.tech  |  Slide 35 of 37</a:t>
             </a:r>
           </a:p>
         </p:txBody>
@@ -16979,7 +16979,7 @@
               </a:defRPr>
             </a:pPr>
             <a:r>
-              <a:t>WhatsApp / Helpline: +91 91101 13671  |  वेबसाइट: sagarcoaching.tech  |  Slide 36 of 37</a:t>
+              <a:t>वेबसाइट: sagarcoaching.tech  |  Slide 36 of 37</a:t>
             </a:r>
           </a:p>
         </p:txBody>
@@ -17559,7 +17559,7 @@
               </a:defRPr>
             </a:pPr>
             <a:r>
-              <a:t>मार्गदर्शक: सागर सर (NMMS King)  |  Helpline / WhatsApp: +91 91101 13671  |  Website: sagarcoaching.tech</a:t>
+              <a:t>मार्गदर्शक: सागर सर (NMMS King)  |  Website: sagarcoaching.tech</a:t>
             </a:r>
           </a:p>
         </p:txBody>
@@ -17731,7 +17731,7 @@
               </a:defRPr>
             </a:pPr>
             <a:r>
-              <a:t>WhatsApp / Helpline: +91 91101 13671  |  वेबसाइट: sagarcoaching.tech  |  Slide 4 of 37</a:t>
+              <a:t>वेबसाइट: sagarcoaching.tech  |  Slide 4 of 37</a:t>
             </a:r>
           </a:p>
         </p:txBody>
@@ -18129,7 +18129,7 @@
               </a:defRPr>
             </a:pPr>
             <a:r>
-              <a:t>WhatsApp / Helpline: +91 91101 13671  |  वेबसाइट: sagarcoaching.tech  |  Slide 5 of 37</a:t>
+              <a:t>वेबसाइट: sagarcoaching.tech  |  Slide 5 of 37</a:t>
             </a:r>
           </a:p>
         </p:txBody>
@@ -18576,7 +18576,7 @@
               </a:defRPr>
             </a:pPr>
             <a:r>
-              <a:t>WhatsApp / Helpline: +91 91101 13671  |  वेबसाइट: sagarcoaching.tech  |  Slide 6 of 37</a:t>
+              <a:t>वेबसाइट: sagarcoaching.tech  |  Slide 6 of 37</a:t>
             </a:r>
           </a:p>
         </p:txBody>
@@ -19094,7 +19094,7 @@
               </a:defRPr>
             </a:pPr>
             <a:r>
-              <a:t>WhatsApp / Helpline: +91 91101 13671  |  वेबसाइट: sagarcoaching.tech  |  Slide 7 of 37</a:t>
+              <a:t>वेबसाइट: sagarcoaching.tech  |  Slide 7 of 37</a:t>
             </a:r>
           </a:p>
         </p:txBody>
@@ -19541,7 +19541,7 @@
               </a:defRPr>
             </a:pPr>
             <a:r>
-              <a:t>WhatsApp / Helpline: +91 91101 13671  |  वेबसाइट: sagarcoaching.tech  |  Slide 8 of 37</a:t>
+              <a:t>वेबसाइट: sagarcoaching.tech  |  Slide 8 of 37</a:t>
             </a:r>
           </a:p>
         </p:txBody>
@@ -20059,7 +20059,7 @@
               </a:defRPr>
             </a:pPr>
             <a:r>
-              <a:t>WhatsApp / Helpline: +91 91101 13671  |  वेबसाइट: sagarcoaching.tech  |  Slide 9 of 37</a:t>
+              <a:t>वेबसाइट: sagarcoaching.tech  |  Slide 9 of 37</a:t>
             </a:r>
           </a:p>
         </p:txBody>
